--- a/04-Observability/Session3/04-03-ELK-Kubernetes-Logging.pptx
+++ b/04-Observability/Session3/04-03-ELK-Kubernetes-Logging.pptx
@@ -1633,7 +1633,7 @@
               <a:buNone/>
             </a:pPr>
             <a:r>
-              <a:rPr sz="4000" b="1">
+              <a:rPr sz="4000" b="1" dirty="0">
                 <a:solidFill>
                   <a:srgbClr val="FFFFFF"/>
                 </a:solidFill>
@@ -1641,9 +1641,31 @@
                 <a:ea typeface="Arial"/>
                 <a:cs typeface="Arial"/>
               </a:rPr>
-              <a:t>ELK Stack: Centralized Logging</a:t>
-            </a:r>
-            <a:endParaRPr sz="4000"/>
+              <a:t>ELK </a:t>
+            </a:r>
+            <a:r>
+              <a:rPr lang="en-US" sz="4000" b="1" dirty="0">
+                <a:solidFill>
+                  <a:srgbClr val="FFFFFF"/>
+                </a:solidFill>
+                <a:latin typeface="Arial"/>
+                <a:ea typeface="Arial"/>
+                <a:cs typeface="Arial"/>
+              </a:rPr>
+              <a:t>/ Elastic </a:t>
+            </a:r>
+            <a:r>
+              <a:rPr sz="4000" b="1" dirty="0">
+                <a:solidFill>
+                  <a:srgbClr val="FFFFFF"/>
+                </a:solidFill>
+                <a:latin typeface="Arial"/>
+                <a:ea typeface="Arial"/>
+                <a:cs typeface="Arial"/>
+              </a:rPr>
+              <a:t>Stack: Centralized Logging</a:t>
+            </a:r>
+            <a:endParaRPr sz="4000" dirty="0"/>
           </a:p>
         </p:txBody>
       </p:sp>
